--- a/media/resources/files/EkiOrunduuOnduktar_KOBOYTUU_BOLUU_KataryMNTort.pptx
+++ b/media/resources/files/EkiOrunduuOnduktar_KOBOYTUU_BOLUU_KataryMNTort.pptx
@@ -9059,7 +9059,7 @@
                 <a:ea typeface="+mn-ea"/>
                 <a:cs typeface="+mn-cs"/>
               </a:rPr>
-              <a:t>Турдуу пикирлер учун ыраазычылык билдиребиз.</a:t>
+              <a:t>Түрдүү пикирлер үчүн ыраазычылык билдиребиз.</a:t>
             </a:r>
           </a:p>
           <a:p>

--- a/media/resources/files/EkiOrunduuOnduktar_KOBOYTUU_BOLUU_KataryMNTort.pptx
+++ b/media/resources/files/EkiOrunduuOnduktar_KOBOYTUU_BOLUU_KataryMNTort.pptx
@@ -4570,7 +4570,7 @@
                             <a:schemeClr val="tx1"/>
                           </a:solidFill>
                         </a:rPr>
-                        <a:t>0.088</a:t>
+                        <a:t>0,088</a:t>
                       </a:r>
                     </a:p>
                   </a:txBody>
@@ -4644,7 +4644,7 @@
                             <a:schemeClr val="tx1"/>
                           </a:solidFill>
                         </a:rPr>
-                        <a:t>1.75</a:t>
+                        <a:t>1,75</a:t>
                       </a:r>
                     </a:p>
                   </a:txBody>
@@ -4702,7 +4702,7 @@
                             <a:schemeClr val="tx1"/>
                           </a:solidFill>
                         </a:rPr>
-                        <a:t>4.08</a:t>
+                        <a:t>4,08</a:t>
                       </a:r>
                     </a:p>
                   </a:txBody>
@@ -4899,7 +4899,7 @@
                             <a:schemeClr val="tx1"/>
                           </a:solidFill>
                         </a:rPr>
-                        <a:t>3.2</a:t>
+                        <a:t>3,2</a:t>
                       </a:r>
                     </a:p>
                   </a:txBody>
@@ -4973,7 +4973,7 @@
                             <a:schemeClr val="tx1"/>
                           </a:solidFill>
                         </a:rPr>
-                        <a:t>2.34</a:t>
+                        <a:t>2,34</a:t>
                       </a:r>
                     </a:p>
                   </a:txBody>
@@ -5105,7 +5105,7 @@
                             <a:schemeClr val="tx1"/>
                           </a:solidFill>
                         </a:rPr>
-                        <a:t>0.2142</a:t>
+                        <a:t>0,2142</a:t>
                       </a:r>
                     </a:p>
                   </a:txBody>
@@ -5163,7 +5163,7 @@
                             <a:schemeClr val="tx1"/>
                           </a:solidFill>
                         </a:rPr>
-                        <a:t>5.5</a:t>
+                        <a:t>5,5</a:t>
                       </a:r>
                     </a:p>
                   </a:txBody>
@@ -5228,7 +5228,7 @@
                             <a:schemeClr val="tx1"/>
                           </a:solidFill>
                         </a:rPr>
-                        <a:t>0.128</a:t>
+                        <a:t>0,128</a:t>
                       </a:r>
                     </a:p>
                   </a:txBody>
@@ -5302,7 +5302,7 @@
                             <a:schemeClr val="tx1"/>
                           </a:solidFill>
                         </a:rPr>
-                        <a:t>0.744</a:t>
+                        <a:t>0,744</a:t>
                       </a:r>
                     </a:p>
                   </a:txBody>
@@ -5434,7 +5434,7 @@
                             <a:schemeClr val="tx1"/>
                           </a:solidFill>
                         </a:rPr>
-                        <a:t>4.05</a:t>
+                        <a:t>4,05</a:t>
                       </a:r>
                     </a:p>
                   </a:txBody>
@@ -5631,7 +5631,7 @@
                             <a:schemeClr val="tx1"/>
                           </a:solidFill>
                         </a:rPr>
-                        <a:t>2.8</a:t>
+                        <a:t>2,8</a:t>
                       </a:r>
                     </a:p>
                   </a:txBody>
@@ -5689,7 +5689,7 @@
                             <a:schemeClr val="tx1"/>
                           </a:solidFill>
                         </a:rPr>
-                        <a:t>1.89</a:t>
+                        <a:t>1,89</a:t>
                       </a:r>
                     </a:p>
                   </a:txBody>
@@ -5821,7 +5821,7 @@
                             <a:schemeClr val="tx1"/>
                           </a:solidFill>
                         </a:rPr>
-                        <a:t>1.12</a:t>
+                        <a:t>1,12</a:t>
                       </a:r>
                     </a:p>
                   </a:txBody>
@@ -5886,7 +5886,7 @@
                             <a:schemeClr val="tx1"/>
                           </a:solidFill>
                         </a:rPr>
-                        <a:t>1.12</a:t>
+                        <a:t>1,12</a:t>
                       </a:r>
                     </a:p>
                   </a:txBody>
@@ -6018,7 +6018,7 @@
                             <a:schemeClr val="tx1"/>
                           </a:solidFill>
                         </a:rPr>
-                        <a:t>3.4</a:t>
+                        <a:t>3,4</a:t>
                       </a:r>
                     </a:p>
                   </a:txBody>
@@ -6150,7 +6150,7 @@
                             <a:schemeClr val="tx1"/>
                           </a:solidFill>
                         </a:rPr>
-                        <a:t>0.861</a:t>
+                        <a:t>0,861</a:t>
                       </a:r>
                     </a:p>
                   </a:txBody>
@@ -6277,7 +6277,7 @@
                           <a:latin typeface="Arial" panose="020B0604020202020204" pitchFamily="34" charset="0"/>
                           <a:cs typeface="Arial" panose="020B0604020202020204" pitchFamily="34" charset="0"/>
                         </a:rPr>
-                        <a:t> 0.31 × 2.3</a:t>
+                        <a:t> 0,31 × 2,3</a:t>
                       </a:r>
                     </a:p>
                   </a:txBody>
@@ -6353,7 +6353,7 @@
                           <a:latin typeface="Arial" panose="020B0604020202020204" pitchFamily="34" charset="0"/>
                           <a:cs typeface="Arial" panose="020B0604020202020204" pitchFamily="34" charset="0"/>
                         </a:rPr>
-                        <a:t>2.04 ÷ 0.6</a:t>
+                        <a:t>2,04 ÷ 0,6</a:t>
                       </a:r>
                     </a:p>
                   </a:txBody>
@@ -6436,7 +6436,7 @@
                           <a:latin typeface="Arial" panose="020B0604020202020204" pitchFamily="34" charset="0"/>
                           <a:cs typeface="Arial" panose="020B0604020202020204" pitchFamily="34" charset="0"/>
                         </a:rPr>
-                        <a:t>15.6 ÷ 1.3</a:t>
+                        <a:t>15,6 ÷ 1,3</a:t>
                       </a:r>
                     </a:p>
                   </a:txBody>
@@ -6512,7 +6512,7 @@
                           <a:latin typeface="Arial" panose="020B0604020202020204" pitchFamily="34" charset="0"/>
                           <a:cs typeface="Arial" panose="020B0604020202020204" pitchFamily="34" charset="0"/>
                         </a:rPr>
-                        <a:t>0.78 × 3</a:t>
+                        <a:t>0,78 × 3</a:t>
                       </a:r>
                     </a:p>
                   </a:txBody>
@@ -6595,7 +6595,7 @@
                           <a:latin typeface="Arial" panose="020B0604020202020204" pitchFamily="34" charset="0"/>
                           <a:cs typeface="Arial" panose="020B0604020202020204" pitchFamily="34" charset="0"/>
                         </a:rPr>
-                        <a:t>0.2 × 0.44</a:t>
+                        <a:t>0,2 × 0,44</a:t>
                       </a:r>
                     </a:p>
                   </a:txBody>
@@ -6671,7 +6671,7 @@
                           <a:latin typeface="Arial" panose="020B0604020202020204" pitchFamily="34" charset="0"/>
                           <a:cs typeface="Arial" panose="020B0604020202020204" pitchFamily="34" charset="0"/>
                         </a:rPr>
-                        <a:t>3.6 ÷ 0.6</a:t>
+                        <a:t>3,6 ÷ 0,6</a:t>
                       </a:r>
                     </a:p>
                   </a:txBody>
@@ -6754,7 +6754,7 @@
                           <a:latin typeface="Arial" panose="020B0604020202020204" pitchFamily="34" charset="0"/>
                           <a:cs typeface="Arial" panose="020B0604020202020204" pitchFamily="34" charset="0"/>
                         </a:rPr>
-                        <a:t>11 ÷ 1.1</a:t>
+                        <a:t>11 ÷ 1,1</a:t>
                       </a:r>
                     </a:p>
                   </a:txBody>
@@ -6830,7 +6830,7 @@
                           <a:latin typeface="Arial" panose="020B0604020202020204" pitchFamily="34" charset="0"/>
                           <a:cs typeface="Arial" panose="020B0604020202020204" pitchFamily="34" charset="0"/>
                         </a:rPr>
-                        <a:t>0.32 × 0.4</a:t>
+                        <a:t>0,32 × 0,4</a:t>
                       </a:r>
                     </a:p>
                   </a:txBody>
@@ -6913,7 +6913,7 @@
                           <a:latin typeface="Arial" panose="020B0604020202020204" pitchFamily="34" charset="0"/>
                           <a:cs typeface="Arial" panose="020B0604020202020204" pitchFamily="34" charset="0"/>
                         </a:rPr>
-                        <a:t>0.42 × 0.51</a:t>
+                        <a:t>0,42 × 0,51</a:t>
                       </a:r>
                     </a:p>
                   </a:txBody>
@@ -6989,7 +6989,7 @@
                           <a:latin typeface="Arial" panose="020B0604020202020204" pitchFamily="34" charset="0"/>
                           <a:cs typeface="Arial" panose="020B0604020202020204" pitchFamily="34" charset="0"/>
                         </a:rPr>
-                        <a:t>8.4 ÷ 1.2</a:t>
+                        <a:t>8,4 ÷ 1,2</a:t>
                       </a:r>
                     </a:p>
                   </a:txBody>
@@ -7072,7 +7072,7 @@
                           <a:latin typeface="Arial" panose="020B0604020202020204" pitchFamily="34" charset="0"/>
                           <a:cs typeface="Arial" panose="020B0604020202020204" pitchFamily="34" charset="0"/>
                         </a:rPr>
-                        <a:t>4.5 ÷ 0.9</a:t>
+                        <a:t>4,5 ÷ 0,9</a:t>
                       </a:r>
                     </a:p>
                   </a:txBody>
@@ -7148,7 +7148,7 @@
                           <a:latin typeface="Arial" panose="020B0604020202020204" pitchFamily="34" charset="0"/>
                           <a:cs typeface="Arial" panose="020B0604020202020204" pitchFamily="34" charset="0"/>
                         </a:rPr>
-                        <a:t>0.5 × 3.5</a:t>
+                        <a:t>0,5 × 3,5</a:t>
                       </a:r>
                     </a:p>
                   </a:txBody>
@@ -7231,7 +7231,7 @@
                           <a:latin typeface="Arial" panose="020B0604020202020204" pitchFamily="34" charset="0"/>
                           <a:cs typeface="Arial" panose="020B0604020202020204" pitchFamily="34" charset="0"/>
                         </a:rPr>
-                        <a:t>4.5 × 0.9</a:t>
+                        <a:t>4,5 × 0,9</a:t>
                       </a:r>
                     </a:p>
                   </a:txBody>
@@ -7307,7 +7307,7 @@
                           <a:latin typeface="Arial" panose="020B0604020202020204" pitchFamily="34" charset="0"/>
                           <a:cs typeface="Arial" panose="020B0604020202020204" pitchFamily="34" charset="0"/>
                         </a:rPr>
-                        <a:t>1.2 ÷ 0.3</a:t>
+                        <a:t>1,2 ÷ 0,3</a:t>
                       </a:r>
                     </a:p>
                   </a:txBody>
@@ -7390,7 +7390,7 @@
                           <a:latin typeface="Arial" panose="020B0604020202020204" pitchFamily="34" charset="0"/>
                           <a:cs typeface="Arial" panose="020B0604020202020204" pitchFamily="34" charset="0"/>
                         </a:rPr>
-                        <a:t>1.26 ÷ 0.14</a:t>
+                        <a:t>1,26 ÷ 0,14</a:t>
                       </a:r>
                     </a:p>
                   </a:txBody>
@@ -7466,7 +7466,7 @@
                           <a:latin typeface="Arial" panose="020B0604020202020204" pitchFamily="34" charset="0"/>
                           <a:cs typeface="Arial" panose="020B0604020202020204" pitchFamily="34" charset="0"/>
                         </a:rPr>
-                        <a:t>3.4 × 1.2</a:t>
+                        <a:t>3,4 × 1,2</a:t>
                       </a:r>
                     </a:p>
                   </a:txBody>
@@ -7549,7 +7549,7 @@
                           <a:latin typeface="Arial" panose="020B0604020202020204" pitchFamily="34" charset="0"/>
                           <a:cs typeface="Arial" panose="020B0604020202020204" pitchFamily="34" charset="0"/>
                         </a:rPr>
-                        <a:t>0.9 × 2.1</a:t>
+                        <a:t>0,9 × 2,1</a:t>
                       </a:r>
                     </a:p>
                   </a:txBody>
@@ -7625,7 +7625,7 @@
                           <a:latin typeface="Arial" panose="020B0604020202020204" pitchFamily="34" charset="0"/>
                           <a:cs typeface="Arial" panose="020B0604020202020204" pitchFamily="34" charset="0"/>
                         </a:rPr>
-                        <a:t>0.84 ÷ 0.3</a:t>
+                        <a:t>0,84 ÷ 0,3</a:t>
                       </a:r>
                     </a:p>
                   </a:txBody>
@@ -7708,7 +7708,7 @@
                           <a:latin typeface="Arial" panose="020B0604020202020204" pitchFamily="34" charset="0"/>
                           <a:cs typeface="Arial" panose="020B0604020202020204" pitchFamily="34" charset="0"/>
                         </a:rPr>
-                        <a:t>2.56 ÷ 0.8</a:t>
+                        <a:t>2,56 ÷ 0,8</a:t>
                       </a:r>
                     </a:p>
                   </a:txBody>
@@ -7784,7 +7784,7 @@
                           <a:latin typeface="Arial" panose="020B0604020202020204" pitchFamily="34" charset="0"/>
                           <a:cs typeface="Arial" panose="020B0604020202020204" pitchFamily="34" charset="0"/>
                         </a:rPr>
-                        <a:t>1.6 × 0.7</a:t>
+                        <a:t>1,6 × 0,7</a:t>
                       </a:r>
                     </a:p>
                   </a:txBody>
@@ -7867,7 +7867,7 @@
                           <a:latin typeface="Arial" panose="020B0604020202020204" pitchFamily="34" charset="0"/>
                           <a:cs typeface="Arial" panose="020B0604020202020204" pitchFamily="34" charset="0"/>
                         </a:rPr>
-                        <a:t>2.1 × 0.41</a:t>
+                        <a:t>2,1 × 0,41</a:t>
                       </a:r>
                     </a:p>
                   </a:txBody>
@@ -7943,7 +7943,7 @@
                           <a:latin typeface="Arial" panose="020B0604020202020204" pitchFamily="34" charset="0"/>
                           <a:cs typeface="Arial" panose="020B0604020202020204" pitchFamily="34" charset="0"/>
                         </a:rPr>
-                        <a:t>4.5 ÷ 1.5</a:t>
+                        <a:t>4,5 ÷ 1,5</a:t>
                       </a:r>
                     </a:p>
                   </a:txBody>
@@ -8026,7 +8026,7 @@
                           <a:latin typeface="Arial" panose="020B0604020202020204" pitchFamily="34" charset="0"/>
                           <a:cs typeface="Arial" panose="020B0604020202020204" pitchFamily="34" charset="0"/>
                         </a:rPr>
-                        <a:t>0.8 ÷ 0.1</a:t>
+                        <a:t>0,8 ÷ 0,1</a:t>
                       </a:r>
                     </a:p>
                   </a:txBody>
@@ -8102,7 +8102,7 @@
                           <a:latin typeface="Arial" panose="020B0604020202020204" pitchFamily="34" charset="0"/>
                           <a:cs typeface="Arial" panose="020B0604020202020204" pitchFamily="34" charset="0"/>
                         </a:rPr>
-                        <a:t>2 × 0.56</a:t>
+                        <a:t>2 × 0,56</a:t>
                       </a:r>
                     </a:p>
                   </a:txBody>
@@ -8185,7 +8185,7 @@
                           <a:latin typeface="Arial" panose="020B0604020202020204" pitchFamily="34" charset="0"/>
                           <a:cs typeface="Arial" panose="020B0604020202020204" pitchFamily="34" charset="0"/>
                         </a:rPr>
-                        <a:t>3.85 ÷ 0.7</a:t>
+                        <a:t>3,85 ÷ 0,7</a:t>
                       </a:r>
                     </a:p>
                   </a:txBody>
